--- a/figures/ppt/端到端传输场景图.pptx
+++ b/figures/ppt/端到端传输场景图.pptx
@@ -2935,7 +2935,7 @@
       <p:grpSpPr/>
       <p:pic>
         <p:nvPicPr>
-          <p:cNvPr id="4" name="图片 3" descr="端到端传输场景图"/>
+          <p:cNvPr id="3" name="图片 2" descr="端到端传输场景图"/>
           <p:cNvPicPr>
             <a:picLocks noChangeAspect="1"/>
           </p:cNvPicPr>
@@ -2949,8 +2949,8 @@
         </p:blipFill>
         <p:spPr>
           <a:xfrm>
-            <a:off x="1841500" y="391795"/>
-            <a:ext cx="7916545" cy="6261735"/>
+            <a:off x="1949450" y="422910"/>
+            <a:ext cx="7715250" cy="6102350"/>
           </a:xfrm>
           <a:prstGeom prst="rect">
             <a:avLst/>
@@ -3264,7 +3264,7 @@
         </p:blipFill>
         <p:spPr>
           <a:xfrm>
-            <a:off x="7086600" y="5374640"/>
+            <a:off x="7045960" y="5289550"/>
             <a:ext cx="223520" cy="223520"/>
           </a:xfrm>
           <a:prstGeom prst="rect">
